--- a/tcc-2026/RI-A5.pptx
+++ b/tcc-2026/RI-A5.pptx
@@ -11241,7 +11241,7 @@
         <p:spPr>
           <a:xfrm>
             <a:off x="59240" y="3534299"/>
-            <a:ext cx="5062200" cy="2154900"/>
+            <a:ext cx="5062200" cy="3386400"/>
           </a:xfrm>
           <a:prstGeom prst="rect">
             <a:avLst/>
@@ -11332,6 +11332,236 @@
                 <a:sym typeface="Arial Black"/>
               </a:rPr>
               <a:t>O Render Index é um site de indexação para pessoas que querem aprender sobre a renderização/modelagem 3D e não sabem por onde começar. No site você encontrará diversos materiais e ferramentas sobre isso.</a:t>
+            </a:r>
+            <a:endParaRPr sz="800">
+              <a:solidFill>
+                <a:schemeClr val="dk1"/>
+              </a:solidFill>
+              <a:latin typeface="Arial Black"/>
+              <a:ea typeface="Arial Black"/>
+              <a:cs typeface="Arial Black"/>
+              <a:sym typeface="Arial Black"/>
+            </a:endParaRPr>
+          </a:p>
+          <a:p>
+            <a:pPr indent="0" lvl="0" marL="0" marR="0" rtl="0" algn="just">
+              <a:spcBef>
+                <a:spcPts val="0"/>
+              </a:spcBef>
+              <a:spcAft>
+                <a:spcPts val="0"/>
+              </a:spcAft>
+              <a:buNone/>
+            </a:pPr>
+            <a:r>
+              <a:t/>
+            </a:r>
+            <a:endParaRPr sz="800">
+              <a:solidFill>
+                <a:schemeClr val="dk1"/>
+              </a:solidFill>
+              <a:latin typeface="Arial Black"/>
+              <a:ea typeface="Arial Black"/>
+              <a:cs typeface="Arial Black"/>
+              <a:sym typeface="Arial Black"/>
+            </a:endParaRPr>
+          </a:p>
+          <a:p>
+            <a:pPr indent="0" lvl="0" marL="0" marR="0" rtl="0" algn="just">
+              <a:spcBef>
+                <a:spcPts val="0"/>
+              </a:spcBef>
+              <a:spcAft>
+                <a:spcPts val="0"/>
+              </a:spcAft>
+              <a:buNone/>
+            </a:pPr>
+            <a:r>
+              <a:t/>
+            </a:r>
+            <a:endParaRPr sz="800">
+              <a:solidFill>
+                <a:schemeClr val="dk1"/>
+              </a:solidFill>
+              <a:latin typeface="Arial Black"/>
+              <a:ea typeface="Arial Black"/>
+              <a:cs typeface="Arial Black"/>
+              <a:sym typeface="Arial Black"/>
+            </a:endParaRPr>
+          </a:p>
+          <a:p>
+            <a:pPr indent="0" lvl="0" marL="0" marR="0" rtl="0" algn="just">
+              <a:spcBef>
+                <a:spcPts val="0"/>
+              </a:spcBef>
+              <a:spcAft>
+                <a:spcPts val="0"/>
+              </a:spcAft>
+              <a:buNone/>
+            </a:pPr>
+            <a:r>
+              <a:t/>
+            </a:r>
+            <a:endParaRPr sz="800">
+              <a:solidFill>
+                <a:schemeClr val="dk1"/>
+              </a:solidFill>
+              <a:latin typeface="Arial Black"/>
+              <a:ea typeface="Arial Black"/>
+              <a:cs typeface="Arial Black"/>
+              <a:sym typeface="Arial Black"/>
+            </a:endParaRPr>
+          </a:p>
+          <a:p>
+            <a:pPr indent="0" lvl="0" marL="0" marR="0" rtl="0" algn="just">
+              <a:spcBef>
+                <a:spcPts val="0"/>
+              </a:spcBef>
+              <a:spcAft>
+                <a:spcPts val="0"/>
+              </a:spcAft>
+              <a:buNone/>
+            </a:pPr>
+            <a:r>
+              <a:t/>
+            </a:r>
+            <a:endParaRPr sz="800">
+              <a:solidFill>
+                <a:schemeClr val="dk1"/>
+              </a:solidFill>
+              <a:latin typeface="Arial Black"/>
+              <a:ea typeface="Arial Black"/>
+              <a:cs typeface="Arial Black"/>
+              <a:sym typeface="Arial Black"/>
+            </a:endParaRPr>
+          </a:p>
+          <a:p>
+            <a:pPr indent="0" lvl="0" marL="0" marR="0" rtl="0" algn="just">
+              <a:spcBef>
+                <a:spcPts val="0"/>
+              </a:spcBef>
+              <a:spcAft>
+                <a:spcPts val="0"/>
+              </a:spcAft>
+              <a:buNone/>
+            </a:pPr>
+            <a:r>
+              <a:t/>
+            </a:r>
+            <a:endParaRPr sz="800">
+              <a:solidFill>
+                <a:schemeClr val="dk1"/>
+              </a:solidFill>
+              <a:latin typeface="Arial Black"/>
+              <a:ea typeface="Arial Black"/>
+              <a:cs typeface="Arial Black"/>
+              <a:sym typeface="Arial Black"/>
+            </a:endParaRPr>
+          </a:p>
+          <a:p>
+            <a:pPr indent="0" lvl="0" marL="0" marR="0" rtl="0" algn="just">
+              <a:spcBef>
+                <a:spcPts val="0"/>
+              </a:spcBef>
+              <a:spcAft>
+                <a:spcPts val="0"/>
+              </a:spcAft>
+              <a:buNone/>
+            </a:pPr>
+            <a:r>
+              <a:t/>
+            </a:r>
+            <a:endParaRPr sz="800">
+              <a:solidFill>
+                <a:schemeClr val="dk1"/>
+              </a:solidFill>
+              <a:latin typeface="Arial Black"/>
+              <a:ea typeface="Arial Black"/>
+              <a:cs typeface="Arial Black"/>
+              <a:sym typeface="Arial Black"/>
+            </a:endParaRPr>
+          </a:p>
+          <a:p>
+            <a:pPr indent="0" lvl="0" marL="0" marR="0" rtl="0" algn="just">
+              <a:spcBef>
+                <a:spcPts val="0"/>
+              </a:spcBef>
+              <a:spcAft>
+                <a:spcPts val="0"/>
+              </a:spcAft>
+              <a:buNone/>
+            </a:pPr>
+            <a:r>
+              <a:t/>
+            </a:r>
+            <a:endParaRPr sz="800">
+              <a:solidFill>
+                <a:schemeClr val="dk1"/>
+              </a:solidFill>
+              <a:latin typeface="Arial Black"/>
+              <a:ea typeface="Arial Black"/>
+              <a:cs typeface="Arial Black"/>
+              <a:sym typeface="Arial Black"/>
+            </a:endParaRPr>
+          </a:p>
+          <a:p>
+            <a:pPr indent="0" lvl="0" marL="0" marR="0" rtl="0" algn="just">
+              <a:spcBef>
+                <a:spcPts val="0"/>
+              </a:spcBef>
+              <a:spcAft>
+                <a:spcPts val="0"/>
+              </a:spcAft>
+              <a:buNone/>
+            </a:pPr>
+            <a:r>
+              <a:t/>
+            </a:r>
+            <a:endParaRPr sz="800">
+              <a:solidFill>
+                <a:schemeClr val="dk1"/>
+              </a:solidFill>
+              <a:latin typeface="Arial Black"/>
+              <a:ea typeface="Arial Black"/>
+              <a:cs typeface="Arial Black"/>
+              <a:sym typeface="Arial Black"/>
+            </a:endParaRPr>
+          </a:p>
+          <a:p>
+            <a:pPr indent="0" lvl="0" marL="0" marR="0" rtl="0" algn="just">
+              <a:spcBef>
+                <a:spcPts val="0"/>
+              </a:spcBef>
+              <a:spcAft>
+                <a:spcPts val="0"/>
+              </a:spcAft>
+              <a:buNone/>
+            </a:pPr>
+            <a:r>
+              <a:t/>
+            </a:r>
+            <a:endParaRPr sz="800">
+              <a:solidFill>
+                <a:schemeClr val="dk1"/>
+              </a:solidFill>
+              <a:latin typeface="Arial Black"/>
+              <a:ea typeface="Arial Black"/>
+              <a:cs typeface="Arial Black"/>
+              <a:sym typeface="Arial Black"/>
+            </a:endParaRPr>
+          </a:p>
+          <a:p>
+            <a:pPr indent="0" lvl="0" marL="0" marR="0" rtl="0" algn="just">
+              <a:spcBef>
+                <a:spcPts val="0"/>
+              </a:spcBef>
+              <a:spcAft>
+                <a:spcPts val="0"/>
+              </a:spcAft>
+              <a:buNone/>
+            </a:pPr>
+            <a:r>
+              <a:t/>
             </a:r>
             <a:endParaRPr sz="800">
               <a:solidFill>
@@ -11841,6 +12071,34 @@
           <a:xfrm>
             <a:off x="663100" y="1421815"/>
             <a:ext cx="1059575" cy="1059575"/>
+          </a:xfrm>
+          <a:prstGeom prst="rect">
+            <a:avLst/>
+          </a:prstGeom>
+          <a:noFill/>
+          <a:ln>
+            <a:noFill/>
+          </a:ln>
+        </p:spPr>
+      </p:pic>
+      <p:pic>
+        <p:nvPicPr>
+          <p:cNvPr id="93" name="Google Shape;93;p13"/>
+          <p:cNvPicPr preferRelativeResize="0"/>
+          <p:nvPr/>
+        </p:nvPicPr>
+        <p:blipFill>
+          <a:blip r:embed="rId5">
+            <a:alphaModFix/>
+          </a:blip>
+          <a:stretch>
+            <a:fillRect/>
+          </a:stretch>
+        </p:blipFill>
+        <p:spPr>
+          <a:xfrm>
+            <a:off x="161540" y="4348922"/>
+            <a:ext cx="2600475" cy="1369264"/>
           </a:xfrm>
           <a:prstGeom prst="rect">
             <a:avLst/>
